--- a/assets/ppts/M4.4_Digital_Transmission_Line_Coding.pptx
+++ b/assets/ppts/M4.4_Digital_Transmission_Line_Coding.pptx
@@ -8,6 +8,7 @@
     <p:sldId id="256" r:id="rId7"/>
     <p:sldId id="257" r:id="rId8"/>
     <p:sldId id="258" r:id="rId9"/>
+    <p:sldId id="259" r:id="rId10"/>
   </p:sldIdLst>
   <p:sldSz cx="12191695" cy="6858000" type="screen4x3"/>
   <p:notesSz cx="6858000" cy="9144000"/>
@@ -3141,8 +3142,8 @@
         </p:nvSpPr>
         <p:spPr>
           <a:xfrm>
-            <a:off x="822960" y="1188720"/>
-            <a:ext cx="164592" cy="4480560"/>
+            <a:off x="0" y="0"/>
+            <a:ext cx="12191695" cy="137160"/>
           </a:xfrm>
           <a:prstGeom prst="rect">
             <a:avLst/>
@@ -3178,14 +3179,57 @@
       </p:sp>
       <p:sp>
         <p:nvSpPr>
-          <p:cNvPr id="4" name="TextBox 3"/>
+          <p:cNvPr id="4" name="Rectangle 3"/>
+          <p:cNvSpPr/>
+          <p:nvPr/>
+        </p:nvSpPr>
+        <p:spPr>
+          <a:xfrm>
+            <a:off x="822960" y="1097280"/>
+            <a:ext cx="164592" cy="4663440"/>
+          </a:xfrm>
+          <a:prstGeom prst="rect">
+            <a:avLst/>
+          </a:prstGeom>
+          <a:solidFill>
+            <a:srgbClr val="D97706"/>
+          </a:solidFill>
+          <a:ln>
+            <a:noFill/>
+          </a:ln>
+        </p:spPr>
+        <p:style>
+          <a:lnRef idx="1">
+            <a:schemeClr val="accent1"/>
+          </a:lnRef>
+          <a:fillRef idx="3">
+            <a:schemeClr val="accent1"/>
+          </a:fillRef>
+          <a:effectRef idx="2">
+            <a:schemeClr val="accent1"/>
+          </a:effectRef>
+          <a:fontRef idx="minor">
+            <a:schemeClr val="lt1"/>
+          </a:fontRef>
+        </p:style>
+        <p:txBody>
+          <a:bodyPr rtlCol="0" anchor="ctr"/>
+          <a:lstStyle/>
+          <a:p>
+            <a:pPr algn="ctr"/>
+          </a:p>
+        </p:txBody>
+      </p:sp>
+      <p:sp>
+        <p:nvSpPr>
+          <p:cNvPr id="5" name="TextBox 4"/>
           <p:cNvSpPr txBox="1"/>
           <p:nvPr/>
         </p:nvSpPr>
         <p:spPr>
           <a:xfrm>
-            <a:off x="1280160" y="1097280"/>
-            <a:ext cx="10058400" cy="4663440"/>
+            <a:off x="1234440" y="1005840"/>
+            <a:ext cx="10241280" cy="4846320"/>
           </a:xfrm>
           <a:prstGeom prst="rect">
             <a:avLst/>
@@ -3200,70 +3244,165 @@
           <a:p>
             <a:pPr>
               <a:spcAft>
+                <a:spcPts val="1000"/>
+              </a:spcAft>
+              <a:defRPr b="1" sz="1300">
+                <a:solidFill>
+                  <a:srgbClr val="D97706"/>
+                </a:solidFill>
+              </a:defRPr>
+            </a:pPr>
+            <a:r>
+              <a:t>PCCST501 Computer Networks | KTU 2024 Scheme • MODULE 4 • M4.4</a:t>
+            </a:r>
+          </a:p>
+          <a:p>
+            <a:pPr>
+              <a:spcAft>
                 <a:spcPts val="1200"/>
               </a:spcAft>
-              <a:defRPr b="1" sz="1300">
-                <a:solidFill>
-                  <a:srgbClr val="D97706"/>
+              <a:defRPr b="1" sz="3000">
+                <a:solidFill>
+                  <a:srgbClr val="F8FAFC"/>
                 </a:solidFill>
               </a:defRPr>
             </a:pPr>
             <a:r>
-              <a:t>PCCST501 Computer Networks | KTU 2024 Scheme • MODULE 4 • M4.4</a:t>
+              <a:t>Digital Transmission &amp; Line Coding Schemes</a:t>
             </a:r>
           </a:p>
           <a:p>
             <a:pPr>
               <a:spcAft>
-                <a:spcPts val="1400"/>
+                <a:spcPts val="2400"/>
               </a:spcAft>
-              <a:defRPr b="1" sz="3200">
-                <a:solidFill>
-                  <a:srgbClr val="F8FAFC"/>
+              <a:defRPr sz="1600">
+                <a:solidFill>
+                  <a:srgbClr val="94A3B8"/>
                 </a:solidFill>
               </a:defRPr>
             </a:pPr>
             <a:r>
-              <a:t>Digital Transmission: Line Coding Techniques</a:t>
+              <a:t>Line Coding Criteria (DC, Sync, Baseline Wander), Unipolar, Polar (NRZ, RZ, Manchester, Diff Manchester), Bipolar (AMI), Block Coding (4B/5B), PCM &amp; DM</a:t>
             </a:r>
           </a:p>
           <a:p>
             <a:pPr>
               <a:spcAft>
-                <a:spcPts val="2800"/>
+                <a:spcPts val="300"/>
               </a:spcAft>
-              <a:defRPr sz="1700">
+              <a:defRPr b="1" sz="1350">
+                <a:solidFill>
+                  <a:srgbClr val="E2E8F0"/>
+                </a:solidFill>
+              </a:defRPr>
+            </a:pPr>
+            <a:r>
+              <a:t>Prepared by: Prof. Anju Markose | Assistant Professor, Dept. of CSE | VJCET</a:t>
+            </a:r>
+          </a:p>
+          <a:p>
+            <a:pPr>
+              <a:defRPr sz="1150">
                 <a:solidFill>
                   <a:srgbClr val="94A3B8"/>
                 </a:solidFill>
               </a:defRPr>
             </a:pPr>
             <a:r>
-              <a:t>Baseband Transmission, Unipolar, Polar (NRZ-L, NRZ-I), Biphase (Manchester, Differential Manchester), Bipolar AMI &amp; Block Codes</a:t>
-            </a:r>
-          </a:p>
+              <a:t>Viswajyothi College of Engineering and Technology (VJCET), Vazhakulam • KTU S5 CSE</a:t>
+            </a:r>
+          </a:p>
+        </p:txBody>
+      </p:sp>
+      <p:sp>
+        <p:nvSpPr>
+          <p:cNvPr id="6" name="Rounded Rectangle 5"/>
+          <p:cNvSpPr/>
+          <p:nvPr/>
+        </p:nvSpPr>
+        <p:spPr>
+          <a:xfrm>
+            <a:off x="8412480" y="5120640"/>
+            <a:ext cx="3017520" cy="822960"/>
+          </a:xfrm>
+          <a:prstGeom prst="roundRect">
+            <a:avLst/>
+          </a:prstGeom>
+          <a:solidFill>
+            <a:srgbClr val="1E293B"/>
+          </a:solidFill>
+          <a:ln w="12700">
+            <a:solidFill>
+              <a:srgbClr val="0E7490"/>
+            </a:solidFill>
+          </a:ln>
+        </p:spPr>
+        <p:style>
+          <a:lnRef idx="1">
+            <a:schemeClr val="accent1"/>
+          </a:lnRef>
+          <a:fillRef idx="3">
+            <a:schemeClr val="accent1"/>
+          </a:fillRef>
+          <a:effectRef idx="2">
+            <a:schemeClr val="accent1"/>
+          </a:effectRef>
+          <a:fontRef idx="minor">
+            <a:schemeClr val="lt1"/>
+          </a:fontRef>
+        </p:style>
+        <p:txBody>
+          <a:bodyPr rtlCol="0" anchor="ctr"/>
+          <a:lstStyle/>
+          <a:p>
+            <a:pPr algn="ctr"/>
+          </a:p>
+        </p:txBody>
+      </p:sp>
+      <p:sp>
+        <p:nvSpPr>
+          <p:cNvPr id="7" name="TextBox 6"/>
+          <p:cNvSpPr txBox="1"/>
+          <p:nvPr/>
+        </p:nvSpPr>
+        <p:spPr>
+          <a:xfrm>
+            <a:off x="8503920" y="5166360"/>
+            <a:ext cx="2834640" cy="731520"/>
+          </a:xfrm>
+          <a:prstGeom prst="rect">
+            <a:avLst/>
+          </a:prstGeom>
+          <a:noFill/>
+        </p:spPr>
+        <p:txBody>
+          <a:bodyPr wrap="none">
+            <a:spAutoFit/>
+          </a:bodyPr>
+          <a:lstStyle/>
           <a:p>
             <a:pPr>
-              <a:defRPr b="1" sz="1300">
-                <a:solidFill>
-                  <a:srgbClr val="E2E8F0"/>
+              <a:defRPr b="1" sz="1050">
+                <a:solidFill>
+                  <a:srgbClr val="D97706"/>
                 </a:solidFill>
               </a:defRPr>
             </a:pPr>
             <a:r>
-              <a:t>Prepared by: Prof. Anju Markose | Assistant Professor, Dept. of CSE | VJCET</a:t>
+              <a:t>KTU B.Tech Curriculum</a:t>
             </a:r>
           </a:p>
           <a:p>
             <a:pPr>
-              <a:defRPr sz="1100">
-                <a:solidFill>
-                  <a:srgbClr val="94A3B8"/>
+              <a:defRPr sz="950">
+                <a:solidFill>
+                  <a:srgbClr val="F8FAFC"/>
                 </a:solidFill>
               </a:defRPr>
             </a:pPr>
             <a:r>
-              <a:t>Viswajyothi College of Engineering and Technology (VJCET), Vazhakulam</a:t>
+              <a:t>Official Classroom Slide Deck</a:t>
             </a:r>
           </a:p>
         </p:txBody>
@@ -3395,14 +3534,14 @@
           <a:lstStyle/>
           <a:p>
             <a:pPr>
-              <a:defRPr b="1" sz="2300">
+              <a:defRPr b="1" sz="2200">
                 <a:solidFill>
                   <a:srgbClr val="F8FAFC"/>
                 </a:solidFill>
               </a:defRPr>
             </a:pPr>
             <a:r>
-              <a:t>4.4.1 NRZ vs Biphase Manchester Line Coding</a:t>
+              <a:t>4.4.1 Line Coding Design Criteria &amp; Characteristics</a:t>
             </a:r>
           </a:p>
         </p:txBody>
@@ -3437,27 +3576,140 @@
               </a:defRPr>
             </a:pPr>
             <a:r>
-              <a:t>M4.4 LINE CODING</a:t>
-            </a:r>
-          </a:p>
-        </p:txBody>
-      </p:sp>
-      <p:sp>
-        <p:nvSpPr>
-          <p:cNvPr id="6" name="Rounded Rectangle 5"/>
+              <a:t>M4.4 LINE CODING CRITERIA</a:t>
+            </a:r>
+          </a:p>
+        </p:txBody>
+      </p:sp>
+      <p:sp>
+        <p:nvSpPr>
+          <p:cNvPr id="6" name="TextBox 5"/>
+          <p:cNvSpPr txBox="1"/>
+          <p:nvPr/>
+        </p:nvSpPr>
+        <p:spPr>
+          <a:xfrm>
+            <a:off x="731520" y="1234440"/>
+            <a:ext cx="6858000" cy="4937760"/>
+          </a:xfrm>
+          <a:prstGeom prst="rect">
+            <a:avLst/>
+          </a:prstGeom>
+          <a:noFill/>
+        </p:spPr>
+        <p:txBody>
+          <a:bodyPr wrap="square">
+            <a:spAutoFit/>
+          </a:bodyPr>
+          <a:lstStyle/>
+          <a:p>
+            <a:pPr>
+              <a:spcAft>
+                <a:spcPts val="200"/>
+              </a:spcAft>
+              <a:defRPr b="1" sz="1450">
+                <a:solidFill>
+                  <a:srgbClr val="0F1E4A"/>
+                </a:solidFill>
+              </a:defRPr>
+            </a:pPr>
+            <a:r>
+              <a:t>• Line Coding Definition</a:t>
+            </a:r>
+          </a:p>
+          <a:p>
+            <a:pPr>
+              <a:spcAft>
+                <a:spcPts val="700"/>
+              </a:spcAft>
+              <a:defRPr sz="1250">
+                <a:solidFill>
+                  <a:srgbClr val="0F172A"/>
+                </a:solidFill>
+              </a:defRPr>
+            </a:pPr>
+            <a:r>
+              <a:t>   The process of converting a sequence of digital bits (1s and 0s) into a discrete electrical/optical signal waveform for baseband transmission.</a:t>
+            </a:r>
+          </a:p>
+          <a:p>
+            <a:pPr>
+              <a:spcAft>
+                <a:spcPts val="200"/>
+              </a:spcAft>
+              <a:defRPr b="1" sz="1450">
+                <a:solidFill>
+                  <a:srgbClr val="0F1E4A"/>
+                </a:solidFill>
+              </a:defRPr>
+            </a:pPr>
+            <a:r>
+              <a:t>• Key Line Coding Design Criteria</a:t>
+            </a:r>
+          </a:p>
+          <a:p>
+            <a:pPr>
+              <a:spcAft>
+                <a:spcPts val="700"/>
+              </a:spcAft>
+              <a:defRPr sz="1250">
+                <a:solidFill>
+                  <a:srgbClr val="0F172A"/>
+                </a:solidFill>
+              </a:defRPr>
+            </a:pPr>
+            <a:r>
+              <a:t>   1. **Signal Level vs Data Level**: Number of voltage states ($L$) vs bit values. \n 2. **DC Component**: Frequencies around 0 Hz create heat, cannot pass through transformers/capacitors, and waste transmitter power. Desirable = Zero DC. \n 3. **Self-Synchronization**: Signal transitions (edges) must allow receiver clock to synchronize timing, especially during long strings of consecutive 0s or 1s. \n 4. **Baseline Wander**: Running average of signal voltage must remain constant to maintain accurate decision slicing threshold. \n 5. **Error Detection**: Built-in coding violations indicate physical link errors.</a:t>
+            </a:r>
+          </a:p>
+          <a:p>
+            <a:pPr>
+              <a:spcAft>
+                <a:spcPts val="200"/>
+              </a:spcAft>
+              <a:defRPr b="1" sz="1450">
+                <a:solidFill>
+                  <a:srgbClr val="0F1E4A"/>
+                </a:solidFill>
+              </a:defRPr>
+            </a:pPr>
+            <a:r>
+              <a:t>• Pulse Code Modulation (PCM)</a:t>
+            </a:r>
+          </a:p>
+          <a:p>
+            <a:pPr>
+              <a:spcAft>
+                <a:spcPts val="700"/>
+              </a:spcAft>
+              <a:defRPr sz="1250">
+                <a:solidFill>
+                  <a:srgbClr val="0F172A"/>
+                </a:solidFill>
+              </a:defRPr>
+            </a:pPr>
+            <a:r>
+              <a:t>   Digitizes analog signals in 3 steps: 1. **Sampling** (Nyquist Rate $f_s \ge 2 f_{max}$), 2. **Quantization** (approximates sample amplitudes to discrete levels; introduces Quantization Error), 3. **Encoding** (maps quantized levels into $n$-bit binary codewords: Bit Rate $= n \times f_s$).</a:t>
+            </a:r>
+          </a:p>
+        </p:txBody>
+      </p:sp>
+      <p:sp>
+        <p:nvSpPr>
+          <p:cNvPr id="7" name="Rounded Rectangle 6"/>
           <p:cNvSpPr/>
           <p:nvPr/>
         </p:nvSpPr>
         <p:spPr>
           <a:xfrm>
-            <a:off x="731520" y="1280160"/>
-            <a:ext cx="5212080" cy="4846320"/>
+            <a:off x="7955279" y="1234440"/>
+            <a:ext cx="3566160" cy="4892040"/>
           </a:xfrm>
           <a:prstGeom prst="roundRect">
             <a:avLst/>
           </a:prstGeom>
           <a:solidFill>
-            <a:srgbClr val="F1F5F9"/>
+            <a:srgbClr val="F8FAFC"/>
           </a:solidFill>
           <a:ln w="19050">
             <a:solidFill>
@@ -3489,14 +3741,14 @@
       </p:sp>
       <p:sp>
         <p:nvSpPr>
-          <p:cNvPr id="7" name="TextBox 6"/>
+          <p:cNvPr id="8" name="TextBox 7"/>
           <p:cNvSpPr txBox="1"/>
           <p:nvPr/>
         </p:nvSpPr>
         <p:spPr>
           <a:xfrm>
-            <a:off x="914400" y="1417320"/>
-            <a:ext cx="4846320" cy="4572000"/>
+            <a:off x="8138160" y="1371600"/>
+            <a:ext cx="3200400" cy="4572000"/>
           </a:xfrm>
           <a:prstGeom prst="rect">
             <a:avLst/>
@@ -3511,16 +3763,16 @@
           <a:p>
             <a:pPr>
               <a:spcAft>
-                <a:spcPts val="1200"/>
+                <a:spcPts val="1000"/>
               </a:spcAft>
-              <a:defRPr b="1" sz="1600">
-                <a:solidFill>
-                  <a:srgbClr val="0F1E4A"/>
+              <a:defRPr b="1" sz="1500">
+                <a:solidFill>
+                  <a:srgbClr val="0E7490"/>
                 </a:solidFill>
               </a:defRPr>
             </a:pPr>
             <a:r>
-              <a:t>NRZ (Non-Return-to-Zero)</a:t>
+              <a:t>Line Coding Goals</a:t>
             </a:r>
           </a:p>
           <a:p>
@@ -3528,14 +3780,14 @@
               <a:spcAft>
                 <a:spcPts val="600"/>
               </a:spcAft>
-              <a:defRPr sz="1250">
-                <a:solidFill>
-                  <a:srgbClr val="1E293B"/>
+              <a:defRPr sz="1200">
+                <a:solidFill>
+                  <a:srgbClr val="0F172A"/>
                 </a:solidFill>
               </a:defRPr>
             </a:pPr>
             <a:r>
-              <a:t>• NRZ-L (Level): Bit 0 = Positive voltage $+V$; Bit 1 = Negative voltage $-V$</a:t>
+              <a:t>→ Eliminate DC components</a:t>
             </a:r>
           </a:p>
           <a:p>
@@ -3543,14 +3795,14 @@
               <a:spcAft>
                 <a:spcPts val="600"/>
               </a:spcAft>
-              <a:defRPr sz="1250">
-                <a:solidFill>
-                  <a:srgbClr val="1E293B"/>
+              <a:defRPr sz="1200">
+                <a:solidFill>
+                  <a:srgbClr val="0F172A"/>
                 </a:solidFill>
               </a:defRPr>
             </a:pPr>
             <a:r>
-              <a:t>• NRZ-I (Invert): Bit 1 = Transition at bit beginning; Bit 0 = No transition</a:t>
+              <a:t>→ Provide self-synchronization</a:t>
             </a:r>
           </a:p>
           <a:p>
@@ -3558,14 +3810,14 @@
               <a:spcAft>
                 <a:spcPts val="600"/>
               </a:spcAft>
-              <a:defRPr sz="1250">
-                <a:solidFill>
-                  <a:srgbClr val="1E293B"/>
+              <a:defRPr sz="1200">
+                <a:solidFill>
+                  <a:srgbClr val="0F172A"/>
                 </a:solidFill>
               </a:defRPr>
             </a:pPr>
             <a:r>
-              <a:t>• Drawback: Significant DC component; baseline wander; loss of synchronization on consecutive 0s or 1s</a:t>
+              <a:t>→ Prevent baseline wander</a:t>
             </a:r>
           </a:p>
           <a:p>
@@ -3573,60 +3825,30 @@
               <a:spcAft>
                 <a:spcPts val="600"/>
               </a:spcAft>
-              <a:defRPr sz="1250">
-                <a:solidFill>
-                  <a:srgbClr val="1E293B"/>
+              <a:defRPr sz="1200">
+                <a:solidFill>
+                  <a:srgbClr val="0F172A"/>
                 </a:solidFill>
               </a:defRPr>
             </a:pPr>
             <a:r>
-              <a:t>• Bandwidth: Low bandwidth ($B = N / 2$)</a:t>
-            </a:r>
-          </a:p>
-        </p:txBody>
-      </p:sp>
-      <p:sp>
-        <p:nvSpPr>
-          <p:cNvPr id="8" name="Rounded Rectangle 7"/>
-          <p:cNvSpPr/>
-          <p:nvPr/>
-        </p:nvSpPr>
-        <p:spPr>
-          <a:xfrm>
-            <a:off x="6309360" y="1280160"/>
-            <a:ext cx="5212080" cy="4846320"/>
-          </a:xfrm>
-          <a:prstGeom prst="roundRect">
-            <a:avLst/>
-          </a:prstGeom>
-          <a:solidFill>
-            <a:srgbClr val="EEF2FF"/>
-          </a:solidFill>
-          <a:ln w="19050">
-            <a:solidFill>
-              <a:srgbClr val="0F1E4A"/>
-            </a:solidFill>
-          </a:ln>
-        </p:spPr>
-        <p:style>
-          <a:lnRef idx="1">
-            <a:schemeClr val="accent1"/>
-          </a:lnRef>
-          <a:fillRef idx="3">
-            <a:schemeClr val="accent1"/>
-          </a:fillRef>
-          <a:effectRef idx="2">
-            <a:schemeClr val="accent1"/>
-          </a:effectRef>
-          <a:fontRef idx="minor">
-            <a:schemeClr val="lt1"/>
-          </a:fontRef>
-        </p:style>
-        <p:txBody>
-          <a:bodyPr rtlCol="0" anchor="ctr"/>
-          <a:lstStyle/>
-          <a:p>
-            <a:pPr algn="ctr"/>
+              <a:t>→ Minimize bandwidth needs</a:t>
+            </a:r>
+          </a:p>
+          <a:p>
+            <a:pPr>
+              <a:spcAft>
+                <a:spcPts val="600"/>
+              </a:spcAft>
+              <a:defRPr sz="1200">
+                <a:solidFill>
+                  <a:srgbClr val="0F172A"/>
+                </a:solidFill>
+              </a:defRPr>
+            </a:pPr>
+            <a:r>
+              <a:t>→ PCM: Sample -&gt; Quantize -&gt; Encode</a:t>
+            </a:r>
           </a:p>
         </p:txBody>
       </p:sp>
@@ -3638,8 +3860,8 @@
         </p:nvSpPr>
         <p:spPr>
           <a:xfrm>
-            <a:off x="6492240" y="1417320"/>
-            <a:ext cx="4846320" cy="4572000"/>
+            <a:off x="731520" y="6327648"/>
+            <a:ext cx="10789920" cy="320040"/>
           </a:xfrm>
           <a:prstGeom prst="rect">
             <a:avLst/>
@@ -3647,83 +3869,20 @@
           <a:noFill/>
         </p:spPr>
         <p:txBody>
-          <a:bodyPr wrap="square">
+          <a:bodyPr wrap="none">
             <a:spAutoFit/>
           </a:bodyPr>
           <a:lstStyle/>
           <a:p>
             <a:pPr>
-              <a:spcAft>
-                <a:spcPts val="1200"/>
-              </a:spcAft>
-              <a:defRPr b="1" sz="1600">
-                <a:solidFill>
-                  <a:srgbClr val="0E7490"/>
+              <a:defRPr sz="950">
+                <a:solidFill>
+                  <a:srgbClr val="64748B"/>
                 </a:solidFill>
               </a:defRPr>
             </a:pPr>
             <a:r>
-              <a:t>Manchester &amp; Differential Manchester (Self-Clocking)</a:t>
-            </a:r>
-          </a:p>
-          <a:p>
-            <a:pPr>
-              <a:spcAft>
-                <a:spcPts val="600"/>
-              </a:spcAft>
-              <a:defRPr sz="1250">
-                <a:solidFill>
-                  <a:srgbClr val="1E293B"/>
-                </a:solidFill>
-              </a:defRPr>
-            </a:pPr>
-            <a:r>
-              <a:t>• Manchester (IEEE 802.3): Bit 0 = High-to-Low mid-bit transition; Bit 1 = Low-to-High mid-bit transition</a:t>
-            </a:r>
-          </a:p>
-          <a:p>
-            <a:pPr>
-              <a:spcAft>
-                <a:spcPts val="600"/>
-              </a:spcAft>
-              <a:defRPr sz="1250">
-                <a:solidFill>
-                  <a:srgbClr val="1E293B"/>
-                </a:solidFill>
-              </a:defRPr>
-            </a:pPr>
-            <a:r>
-              <a:t>• Diff Manchester (802.5): Always mid-bit transition for clocking. Bit 0 = Transition at bit start; Bit 1 = No transition at start</a:t>
-            </a:r>
-          </a:p>
-          <a:p>
-            <a:pPr>
-              <a:spcAft>
-                <a:spcPts val="600"/>
-              </a:spcAft>
-              <a:defRPr sz="1250">
-                <a:solidFill>
-                  <a:srgbClr val="1E293B"/>
-                </a:solidFill>
-              </a:defRPr>
-            </a:pPr>
-            <a:r>
-              <a:t>• Advantage: Guaranteed mid-bit transition gives perfect receiver clock synchronization and ZERO DC bias!</a:t>
-            </a:r>
-          </a:p>
-          <a:p>
-            <a:pPr>
-              <a:spcAft>
-                <a:spcPts val="600"/>
-              </a:spcAft>
-              <a:defRPr sz="1250">
-                <a:solidFill>
-                  <a:srgbClr val="1E293B"/>
-                </a:solidFill>
-              </a:defRPr>
-            </a:pPr>
-            <a:r>
-              <a:t>• Drawback: Requires DOUBLE bandwidth ($B = N$)</a:t>
+              <a:t>PCCST501 Computer Networks | KTU 2024 Scheme | Prof. Anju Markose | Assistant Professor, Dept. of CSE | VJCET</a:t>
             </a:r>
           </a:p>
         </p:txBody>
@@ -3736,8 +3895,8 @@
         </p:nvSpPr>
         <p:spPr>
           <a:xfrm>
-            <a:off x="731520" y="6309360"/>
-            <a:ext cx="10789920" cy="365760"/>
+            <a:off x="6858000" y="6327648"/>
+            <a:ext cx="4572000" cy="320040"/>
           </a:xfrm>
           <a:prstGeom prst="rect">
             <a:avLst/>
@@ -3750,7 +3909,7 @@
           </a:bodyPr>
           <a:lstStyle/>
           <a:p>
-            <a:pPr>
+            <a:pPr algn="r">
               <a:defRPr sz="950">
                 <a:solidFill>
                   <a:srgbClr val="64748B"/>
@@ -3758,7 +3917,7 @@
               </a:defRPr>
             </a:pPr>
             <a:r>
-              <a:t>PCCST501 Computer Networks | KTU 2024 Scheme | Prof. Anju Markose | Assistant Professor, Dept. of CSE | VJCET</a:t>
+              <a:t>Dept. of CSE, VJCET</a:t>
             </a:r>
           </a:p>
         </p:txBody>
@@ -3890,14 +4049,14 @@
           <a:lstStyle/>
           <a:p>
             <a:pPr>
-              <a:defRPr b="1" sz="2300">
+              <a:defRPr b="1" sz="2200">
                 <a:solidFill>
                   <a:srgbClr val="F8FAFC"/>
                 </a:solidFill>
               </a:defRPr>
             </a:pPr>
             <a:r>
-              <a:t>4.4.2 Bipolar AMI, Block Coding &amp; Scrambling</a:t>
+              <a:t>4.4.2 Major Line Coding Schemes Comparison</a:t>
             </a:r>
           </a:p>
         </p:txBody>
@@ -3932,174 +4091,31 @@
               </a:defRPr>
             </a:pPr>
             <a:r>
-              <a:t>M4.4 BIPOLAR &amp; BLOCK CODES</a:t>
-            </a:r>
-          </a:p>
-        </p:txBody>
-      </p:sp>
-      <p:sp>
-        <p:nvSpPr>
-          <p:cNvPr id="6" name="TextBox 5"/>
-          <p:cNvSpPr txBox="1"/>
-          <p:nvPr/>
-        </p:nvSpPr>
-        <p:spPr>
-          <a:xfrm>
-            <a:off x="731520" y="1280160"/>
-            <a:ext cx="6858000" cy="4937760"/>
-          </a:xfrm>
-          <a:prstGeom prst="rect">
-            <a:avLst/>
-          </a:prstGeom>
-          <a:noFill/>
-        </p:spPr>
-        <p:txBody>
-          <a:bodyPr wrap="square">
-            <a:spAutoFit/>
-          </a:bodyPr>
-          <a:lstStyle/>
-          <a:p>
-            <a:pPr>
-              <a:spcAft>
-                <a:spcPts val="200"/>
-              </a:spcAft>
-              <a:defRPr b="1" sz="1500">
-                <a:solidFill>
-                  <a:srgbClr val="0F1E4A"/>
-                </a:solidFill>
-              </a:defRPr>
-            </a:pPr>
-            <a:r>
-              <a:t>• Bipolar AMI (Alternate Mark Inversion)</a:t>
-            </a:r>
-          </a:p>
-          <a:p>
-            <a:pPr>
-              <a:spcAft>
-                <a:spcPts val="800"/>
-              </a:spcAft>
-              <a:defRPr sz="1300">
-                <a:solidFill>
-                  <a:srgbClr val="1E293B"/>
-                </a:solidFill>
-              </a:defRPr>
-            </a:pPr>
-            <a:r>
-              <a:t>   Bit 0 = Zero volts ($0\text{V}$). Bit 1 = Alternating positive ($+V$) and negative ($-V$) voltages. Eliminates DC component entirely; provides basic error detection (violating polarity rule = error).</a:t>
-            </a:r>
-          </a:p>
-          <a:p>
-            <a:pPr>
-              <a:spcAft>
-                <a:spcPts val="200"/>
-              </a:spcAft>
-              <a:defRPr b="1" sz="1500">
-                <a:solidFill>
-                  <a:srgbClr val="0F1E4A"/>
-                </a:solidFill>
-              </a:defRPr>
-            </a:pPr>
-            <a:r>
-              <a:t>• Loss of Sync on Zeros</a:t>
-            </a:r>
-          </a:p>
-          <a:p>
-            <a:pPr>
-              <a:spcAft>
-                <a:spcPts val="800"/>
-              </a:spcAft>
-              <a:defRPr sz="1300">
-                <a:solidFill>
-                  <a:srgbClr val="1E293B"/>
-                </a:solidFill>
-              </a:defRPr>
-            </a:pPr>
-            <a:r>
-              <a:t>   Long strings of consecutive 0s produce continuous $0\text{V}$, causing receiver clock drift.</a:t>
-            </a:r>
-          </a:p>
-          <a:p>
-            <a:pPr>
-              <a:spcAft>
-                <a:spcPts val="200"/>
-              </a:spcAft>
-              <a:defRPr b="1" sz="1500">
-                <a:solidFill>
-                  <a:srgbClr val="0F1E4A"/>
-                </a:solidFill>
-              </a:defRPr>
-            </a:pPr>
-            <a:r>
-              <a:t>• Scrambling (B8ZS &amp; HDB3)</a:t>
-            </a:r>
-          </a:p>
-          <a:p>
-            <a:pPr>
-              <a:spcAft>
-                <a:spcPts val="800"/>
-              </a:spcAft>
-              <a:defRPr sz="1300">
-                <a:solidFill>
-                  <a:srgbClr val="1E293B"/>
-                </a:solidFill>
-              </a:defRPr>
-            </a:pPr>
-            <a:r>
-              <a:t>   B8ZS (North America T1): Replaces eight consecutive 0s with `000VB0VB` (where V=Bipolar Violation, B=Bipolar Rule). HDB3 (Europe E1): Replaces four consecutive 0s with `000V` or `B00V`.</a:t>
-            </a:r>
-          </a:p>
-          <a:p>
-            <a:pPr>
-              <a:spcAft>
-                <a:spcPts val="200"/>
-              </a:spcAft>
-              <a:defRPr b="1" sz="1500">
-                <a:solidFill>
-                  <a:srgbClr val="0F1E4A"/>
-                </a:solidFill>
-              </a:defRPr>
-            </a:pPr>
-            <a:r>
-              <a:t>• Block Coding (4B/5B &amp; 8B/10B)</a:t>
-            </a:r>
-          </a:p>
-          <a:p>
-            <a:pPr>
-              <a:spcAft>
-                <a:spcPts val="800"/>
-              </a:spcAft>
-              <a:defRPr sz="1300">
-                <a:solidFill>
-                  <a:srgbClr val="1E293B"/>
-                </a:solidFill>
-              </a:defRPr>
-            </a:pPr>
-            <a:r>
-              <a:t>   Converts 4-bit data nibbles into 5-bit codewords ensuring no more than three consecutive 0s ever occur, which are then transmitted using NRZ-I (Used in 100BASE-TX Fast Ethernet).</a:t>
-            </a:r>
-          </a:p>
-        </p:txBody>
-      </p:sp>
-      <p:sp>
-        <p:nvSpPr>
-          <p:cNvPr id="7" name="Rounded Rectangle 6"/>
+              <a:t>M4.4 SCHEMES COMPARISON</a:t>
+            </a:r>
+          </a:p>
+        </p:txBody>
+      </p:sp>
+      <p:sp>
+        <p:nvSpPr>
+          <p:cNvPr id="6" name="Rounded Rectangle 5"/>
           <p:cNvSpPr/>
           <p:nvPr/>
         </p:nvSpPr>
         <p:spPr>
           <a:xfrm>
-            <a:off x="7955279" y="1280160"/>
-            <a:ext cx="3566160" cy="4846320"/>
+            <a:off x="731520" y="1234440"/>
+            <a:ext cx="3383280" cy="4892040"/>
           </a:xfrm>
           <a:prstGeom prst="roundRect">
             <a:avLst/>
           </a:prstGeom>
           <a:solidFill>
-            <a:srgbClr val="F1F5F9"/>
+            <a:srgbClr val="F8FAFC"/>
           </a:solidFill>
           <a:ln w="19050">
             <a:solidFill>
-              <a:srgbClr val="0E7490"/>
+              <a:srgbClr val="0F1E4A"/>
             </a:solidFill>
           </a:ln>
         </p:spPr>
@@ -4127,14 +4143,14 @@
       </p:sp>
       <p:sp>
         <p:nvSpPr>
-          <p:cNvPr id="8" name="TextBox 7"/>
+          <p:cNvPr id="7" name="TextBox 6"/>
           <p:cNvSpPr txBox="1"/>
           <p:nvPr/>
         </p:nvSpPr>
         <p:spPr>
           <a:xfrm>
-            <a:off x="8138160" y="1417320"/>
-            <a:ext cx="3200400" cy="4572000"/>
+            <a:off x="914400" y="1371600"/>
+            <a:ext cx="3017520" cy="4572000"/>
           </a:xfrm>
           <a:prstGeom prst="rect">
             <a:avLst/>
@@ -4151,14 +4167,725 @@
               <a:spcAft>
                 <a:spcPts val="1000"/>
               </a:spcAft>
-              <a:defRPr b="1" sz="1500">
+              <a:defRPr b="1" sz="1550">
+                <a:solidFill>
+                  <a:srgbClr val="0F1E4A"/>
+                </a:solidFill>
+              </a:defRPr>
+            </a:pPr>
+            <a:r>
+              <a:t>Unipolar &amp; Polar NRZ</a:t>
+            </a:r>
+          </a:p>
+          <a:p>
+            <a:pPr>
+              <a:spcAft>
+                <a:spcPts val="500"/>
+              </a:spcAft>
+              <a:defRPr sz="1200">
+                <a:solidFill>
+                  <a:srgbClr val="0F172A"/>
+                </a:solidFill>
+              </a:defRPr>
+            </a:pPr>
+            <a:r>
+              <a:t>• Unipolar NRZ: Bit 1 = Positive voltage $+V$, Bit 0 = Zero 0V. Severe DC component; no synchronization on long 0s/1s</a:t>
+            </a:r>
+          </a:p>
+          <a:p>
+            <a:pPr>
+              <a:spcAft>
+                <a:spcPts val="500"/>
+              </a:spcAft>
+              <a:defRPr sz="1200">
+                <a:solidFill>
+                  <a:srgbClr val="0F172A"/>
+                </a:solidFill>
+              </a:defRPr>
+            </a:pPr>
+            <a:r>
+              <a:t>• Polar NRZ-L (Level): Bit 1 = Negative $-V$, Bit 0 = Positive $+V$. Sensitive to polarity inversion</a:t>
+            </a:r>
+          </a:p>
+          <a:p>
+            <a:pPr>
+              <a:spcAft>
+                <a:spcPts val="500"/>
+              </a:spcAft>
+              <a:defRPr sz="1200">
+                <a:solidFill>
+                  <a:srgbClr val="0F172A"/>
+                </a:solidFill>
+              </a:defRPr>
+            </a:pPr>
+            <a:r>
+              <a:t>• Polar NRZ-I (Invert): Bit 1 = Transition at start of bit interval; Bit 0 = No transition. Immune to polarity inversion, but fails on consecutive 0s</a:t>
+            </a:r>
+          </a:p>
+        </p:txBody>
+      </p:sp>
+      <p:sp>
+        <p:nvSpPr>
+          <p:cNvPr id="8" name="Rounded Rectangle 7"/>
+          <p:cNvSpPr/>
+          <p:nvPr/>
+        </p:nvSpPr>
+        <p:spPr>
+          <a:xfrm>
+            <a:off x="4389120" y="1234440"/>
+            <a:ext cx="3383280" cy="4892040"/>
+          </a:xfrm>
+          <a:prstGeom prst="roundRect">
+            <a:avLst/>
+          </a:prstGeom>
+          <a:solidFill>
+            <a:srgbClr val="EEF2FF"/>
+          </a:solidFill>
+          <a:ln w="19050">
+            <a:solidFill>
+              <a:srgbClr val="0E7490"/>
+            </a:solidFill>
+          </a:ln>
+        </p:spPr>
+        <p:style>
+          <a:lnRef idx="1">
+            <a:schemeClr val="accent1"/>
+          </a:lnRef>
+          <a:fillRef idx="3">
+            <a:schemeClr val="accent1"/>
+          </a:fillRef>
+          <a:effectRef idx="2">
+            <a:schemeClr val="accent1"/>
+          </a:effectRef>
+          <a:fontRef idx="minor">
+            <a:schemeClr val="lt1"/>
+          </a:fontRef>
+        </p:style>
+        <p:txBody>
+          <a:bodyPr rtlCol="0" anchor="ctr"/>
+          <a:lstStyle/>
+          <a:p>
+            <a:pPr algn="ctr"/>
+          </a:p>
+        </p:txBody>
+      </p:sp>
+      <p:sp>
+        <p:nvSpPr>
+          <p:cNvPr id="9" name="TextBox 8"/>
+          <p:cNvSpPr txBox="1"/>
+          <p:nvPr/>
+        </p:nvSpPr>
+        <p:spPr>
+          <a:xfrm>
+            <a:off x="4572000" y="1371600"/>
+            <a:ext cx="3017520" cy="4572000"/>
+          </a:xfrm>
+          <a:prstGeom prst="rect">
+            <a:avLst/>
+          </a:prstGeom>
+          <a:noFill/>
+        </p:spPr>
+        <p:txBody>
+          <a:bodyPr wrap="square">
+            <a:spAutoFit/>
+          </a:bodyPr>
+          <a:lstStyle/>
+          <a:p>
+            <a:pPr>
+              <a:spcAft>
+                <a:spcPts val="1000"/>
+              </a:spcAft>
+              <a:defRPr b="1" sz="1550">
                 <a:solidFill>
                   <a:srgbClr val="0E7490"/>
                 </a:solidFill>
               </a:defRPr>
             </a:pPr>
             <a:r>
-              <a:t>Line Coding Summary</a:t>
+              <a:t>Biphase: Manchester &amp; Differential Manchester</a:t>
+            </a:r>
+          </a:p>
+          <a:p>
+            <a:pPr>
+              <a:spcAft>
+                <a:spcPts val="500"/>
+              </a:spcAft>
+              <a:defRPr sz="1200">
+                <a:solidFill>
+                  <a:srgbClr val="0F172A"/>
+                </a:solidFill>
+              </a:defRPr>
+            </a:pPr>
+            <a:r>
+              <a:t>• Manchester (IEEE 802.3): Mid-bit transition: Bit 1 = High-to-Low transition; Bit 0 = Low-to-High transition. Perfect clock synchronization and Zero DC component, but doubles bandwidth requirement ($2 \times$ baud rate)</a:t>
+            </a:r>
+          </a:p>
+          <a:p>
+            <a:pPr>
+              <a:spcAft>
+                <a:spcPts val="500"/>
+              </a:spcAft>
+              <a:defRPr sz="1200">
+                <a:solidFill>
+                  <a:srgbClr val="0F172A"/>
+                </a:solidFill>
+              </a:defRPr>
+            </a:pPr>
+            <a:r>
+              <a:t>• Differential Manchester (Token Ring): Always transitions in the middle for clocking. Bit 0 = Transition at start of bit interval; Bit 1 = No transition at start. Highly robust against wire twists</a:t>
+            </a:r>
+          </a:p>
+        </p:txBody>
+      </p:sp>
+      <p:sp>
+        <p:nvSpPr>
+          <p:cNvPr id="10" name="Rounded Rectangle 9"/>
+          <p:cNvSpPr/>
+          <p:nvPr/>
+        </p:nvSpPr>
+        <p:spPr>
+          <a:xfrm>
+            <a:off x="8046720" y="1234440"/>
+            <a:ext cx="3383280" cy="4892040"/>
+          </a:xfrm>
+          <a:prstGeom prst="roundRect">
+            <a:avLst/>
+          </a:prstGeom>
+          <a:solidFill>
+            <a:srgbClr val="F8FAFC"/>
+          </a:solidFill>
+          <a:ln w="19050">
+            <a:solidFill>
+              <a:srgbClr val="D97706"/>
+            </a:solidFill>
+          </a:ln>
+        </p:spPr>
+        <p:style>
+          <a:lnRef idx="1">
+            <a:schemeClr val="accent1"/>
+          </a:lnRef>
+          <a:fillRef idx="3">
+            <a:schemeClr val="accent1"/>
+          </a:fillRef>
+          <a:effectRef idx="2">
+            <a:schemeClr val="accent1"/>
+          </a:effectRef>
+          <a:fontRef idx="minor">
+            <a:schemeClr val="lt1"/>
+          </a:fontRef>
+        </p:style>
+        <p:txBody>
+          <a:bodyPr rtlCol="0" anchor="ctr"/>
+          <a:lstStyle/>
+          <a:p>
+            <a:pPr algn="ctr"/>
+          </a:p>
+        </p:txBody>
+      </p:sp>
+      <p:sp>
+        <p:nvSpPr>
+          <p:cNvPr id="11" name="TextBox 10"/>
+          <p:cNvSpPr txBox="1"/>
+          <p:nvPr/>
+        </p:nvSpPr>
+        <p:spPr>
+          <a:xfrm>
+            <a:off x="8229600" y="1371600"/>
+            <a:ext cx="3017520" cy="4572000"/>
+          </a:xfrm>
+          <a:prstGeom prst="rect">
+            <a:avLst/>
+          </a:prstGeom>
+          <a:noFill/>
+        </p:spPr>
+        <p:txBody>
+          <a:bodyPr wrap="square">
+            <a:spAutoFit/>
+          </a:bodyPr>
+          <a:lstStyle/>
+          <a:p>
+            <a:pPr>
+              <a:spcAft>
+                <a:spcPts val="1000"/>
+              </a:spcAft>
+              <a:defRPr b="1" sz="1550">
+                <a:solidFill>
+                  <a:srgbClr val="D97706"/>
+                </a:solidFill>
+              </a:defRPr>
+            </a:pPr>
+            <a:r>
+              <a:t>Bipolar AMI &amp; Multilevel</a:t>
+            </a:r>
+          </a:p>
+          <a:p>
+            <a:pPr>
+              <a:spcAft>
+                <a:spcPts val="500"/>
+              </a:spcAft>
+              <a:defRPr sz="1200">
+                <a:solidFill>
+                  <a:srgbClr val="0F172A"/>
+                </a:solidFill>
+              </a:defRPr>
+            </a:pPr>
+            <a:r>
+              <a:t>• Bipolar AMI: Bit 0 = Zero 0V; Bit 1 = Alternating positive $+V$ and negative $-V$. Zero DC component, low bandwidth, but loses sync on long 0s (solved via B8ZS/HDB3 scrambling)</a:t>
+            </a:r>
+          </a:p>
+        </p:txBody>
+      </p:sp>
+      <p:sp>
+        <p:nvSpPr>
+          <p:cNvPr id="12" name="TextBox 11"/>
+          <p:cNvSpPr txBox="1"/>
+          <p:nvPr/>
+        </p:nvSpPr>
+        <p:spPr>
+          <a:xfrm>
+            <a:off x="731520" y="6327648"/>
+            <a:ext cx="10789920" cy="320040"/>
+          </a:xfrm>
+          <a:prstGeom prst="rect">
+            <a:avLst/>
+          </a:prstGeom>
+          <a:noFill/>
+        </p:spPr>
+        <p:txBody>
+          <a:bodyPr wrap="none">
+            <a:spAutoFit/>
+          </a:bodyPr>
+          <a:lstStyle/>
+          <a:p>
+            <a:pPr>
+              <a:defRPr sz="950">
+                <a:solidFill>
+                  <a:srgbClr val="64748B"/>
+                </a:solidFill>
+              </a:defRPr>
+            </a:pPr>
+            <a:r>
+              <a:t>PCCST501 Computer Networks | KTU 2024 Scheme | Prof. Anju Markose | Assistant Professor, Dept. of CSE | VJCET</a:t>
+            </a:r>
+          </a:p>
+        </p:txBody>
+      </p:sp>
+      <p:sp>
+        <p:nvSpPr>
+          <p:cNvPr id="13" name="TextBox 12"/>
+          <p:cNvSpPr txBox="1"/>
+          <p:nvPr/>
+        </p:nvSpPr>
+        <p:spPr>
+          <a:xfrm>
+            <a:off x="6858000" y="6327648"/>
+            <a:ext cx="4572000" cy="320040"/>
+          </a:xfrm>
+          <a:prstGeom prst="rect">
+            <a:avLst/>
+          </a:prstGeom>
+          <a:noFill/>
+        </p:spPr>
+        <p:txBody>
+          <a:bodyPr wrap="none">
+            <a:spAutoFit/>
+          </a:bodyPr>
+          <a:lstStyle/>
+          <a:p>
+            <a:pPr algn="r">
+              <a:defRPr sz="950">
+                <a:solidFill>
+                  <a:srgbClr val="64748B"/>
+                </a:solidFill>
+              </a:defRPr>
+            </a:pPr>
+            <a:r>
+              <a:t>Dept. of CSE, VJCET</a:t>
+            </a:r>
+          </a:p>
+        </p:txBody>
+      </p:sp>
+    </p:spTree>
+  </p:cSld>
+  <p:clrMapOvr>
+    <a:masterClrMapping/>
+  </p:clrMapOvr>
+</p:sld>
+</file>
+
+<file path=ppt/slides/slide4.xml><?xml version="1.0" encoding="utf-8"?>
+<p:sld xmlns:a="http://schemas.openxmlformats.org/drawingml/2006/main" xmlns:p="http://schemas.openxmlformats.org/presentationml/2006/main" xmlns:r="http://schemas.openxmlformats.org/officeDocument/2006/relationships">
+  <p:cSld>
+    <p:spTree>
+      <p:nvGrpSpPr>
+        <p:cNvPr id="1" name=""/>
+        <p:cNvGrpSpPr/>
+        <p:nvPr/>
+      </p:nvGrpSpPr>
+      <p:grpSpPr/>
+      <p:sp>
+        <p:nvSpPr>
+          <p:cNvPr id="2" name="Rectangle 1"/>
+          <p:cNvSpPr/>
+          <p:nvPr/>
+        </p:nvSpPr>
+        <p:spPr>
+          <a:xfrm>
+            <a:off x="0" y="0"/>
+            <a:ext cx="12191695" cy="1005840"/>
+          </a:xfrm>
+          <a:prstGeom prst="rect">
+            <a:avLst/>
+          </a:prstGeom>
+          <a:solidFill>
+            <a:srgbClr val="0F1E4A"/>
+          </a:solidFill>
+          <a:ln>
+            <a:noFill/>
+          </a:ln>
+        </p:spPr>
+        <p:style>
+          <a:lnRef idx="1">
+            <a:schemeClr val="accent1"/>
+          </a:lnRef>
+          <a:fillRef idx="3">
+            <a:schemeClr val="accent1"/>
+          </a:fillRef>
+          <a:effectRef idx="2">
+            <a:schemeClr val="accent1"/>
+          </a:effectRef>
+          <a:fontRef idx="minor">
+            <a:schemeClr val="lt1"/>
+          </a:fontRef>
+        </p:style>
+        <p:txBody>
+          <a:bodyPr rtlCol="0" anchor="ctr"/>
+          <a:lstStyle/>
+          <a:p>
+            <a:pPr algn="ctr"/>
+          </a:p>
+        </p:txBody>
+      </p:sp>
+      <p:sp>
+        <p:nvSpPr>
+          <p:cNvPr id="3" name="Rectangle 2"/>
+          <p:cNvSpPr/>
+          <p:nvPr/>
+        </p:nvSpPr>
+        <p:spPr>
+          <a:xfrm>
+            <a:off x="0" y="969264"/>
+            <a:ext cx="12191695" cy="36576"/>
+          </a:xfrm>
+          <a:prstGeom prst="rect">
+            <a:avLst/>
+          </a:prstGeom>
+          <a:solidFill>
+            <a:srgbClr val="D97706"/>
+          </a:solidFill>
+          <a:ln>
+            <a:noFill/>
+          </a:ln>
+        </p:spPr>
+        <p:style>
+          <a:lnRef idx="1">
+            <a:schemeClr val="accent1"/>
+          </a:lnRef>
+          <a:fillRef idx="3">
+            <a:schemeClr val="accent1"/>
+          </a:fillRef>
+          <a:effectRef idx="2">
+            <a:schemeClr val="accent1"/>
+          </a:effectRef>
+          <a:fontRef idx="minor">
+            <a:schemeClr val="lt1"/>
+          </a:fontRef>
+        </p:style>
+        <p:txBody>
+          <a:bodyPr rtlCol="0" anchor="ctr"/>
+          <a:lstStyle/>
+          <a:p>
+            <a:pPr algn="ctr"/>
+          </a:p>
+        </p:txBody>
+      </p:sp>
+      <p:sp>
+        <p:nvSpPr>
+          <p:cNvPr id="4" name="TextBox 3"/>
+          <p:cNvSpPr txBox="1"/>
+          <p:nvPr/>
+        </p:nvSpPr>
+        <p:spPr>
+          <a:xfrm>
+            <a:off x="731520" y="164592"/>
+            <a:ext cx="8412480" cy="685800"/>
+          </a:xfrm>
+          <a:prstGeom prst="rect">
+            <a:avLst/>
+          </a:prstGeom>
+          <a:noFill/>
+        </p:spPr>
+        <p:txBody>
+          <a:bodyPr wrap="none">
+            <a:spAutoFit/>
+          </a:bodyPr>
+          <a:lstStyle/>
+          <a:p>
+            <a:pPr>
+              <a:defRPr b="1" sz="2100">
+                <a:solidFill>
+                  <a:srgbClr val="F8FAFC"/>
+                </a:solidFill>
+              </a:defRPr>
+            </a:pPr>
+            <a:r>
+              <a:t>🎯 Exam Booster &amp; Review: Digital Transmission &amp; Line Coding</a:t>
+            </a:r>
+          </a:p>
+        </p:txBody>
+      </p:sp>
+      <p:sp>
+        <p:nvSpPr>
+          <p:cNvPr id="5" name="TextBox 4"/>
+          <p:cNvSpPr txBox="1"/>
+          <p:nvPr/>
+        </p:nvSpPr>
+        <p:spPr>
+          <a:xfrm>
+            <a:off x="8229600" y="164592"/>
+            <a:ext cx="3291840" cy="685800"/>
+          </a:xfrm>
+          <a:prstGeom prst="rect">
+            <a:avLst/>
+          </a:prstGeom>
+          <a:noFill/>
+        </p:spPr>
+        <p:txBody>
+          <a:bodyPr wrap="none">
+            <a:spAutoFit/>
+          </a:bodyPr>
+          <a:lstStyle/>
+          <a:p>
+            <a:pPr algn="r">
+              <a:defRPr b="1" sz="1300">
+                <a:solidFill>
+                  <a:srgbClr val="D97706"/>
+                </a:solidFill>
+              </a:defRPr>
+            </a:pPr>
+            <a:r>
+              <a:t>M4.4</a:t>
+            </a:r>
+          </a:p>
+        </p:txBody>
+      </p:sp>
+      <p:sp>
+        <p:nvSpPr>
+          <p:cNvPr id="6" name="Rounded Rectangle 5"/>
+          <p:cNvSpPr/>
+          <p:nvPr/>
+        </p:nvSpPr>
+        <p:spPr>
+          <a:xfrm>
+            <a:off x="731520" y="1234440"/>
+            <a:ext cx="5303520" cy="4892040"/>
+          </a:xfrm>
+          <a:prstGeom prst="roundRect">
+            <a:avLst/>
+          </a:prstGeom>
+          <a:solidFill>
+            <a:srgbClr val="FEF3C7"/>
+          </a:solidFill>
+          <a:ln w="19050">
+            <a:solidFill>
+              <a:srgbClr val="D97706"/>
+            </a:solidFill>
+          </a:ln>
+        </p:spPr>
+        <p:style>
+          <a:lnRef idx="1">
+            <a:schemeClr val="accent1"/>
+          </a:lnRef>
+          <a:fillRef idx="3">
+            <a:schemeClr val="accent1"/>
+          </a:fillRef>
+          <a:effectRef idx="2">
+            <a:schemeClr val="accent1"/>
+          </a:effectRef>
+          <a:fontRef idx="minor">
+            <a:schemeClr val="lt1"/>
+          </a:fontRef>
+        </p:style>
+        <p:txBody>
+          <a:bodyPr rtlCol="0" anchor="ctr"/>
+          <a:lstStyle/>
+          <a:p>
+            <a:pPr algn="ctr"/>
+          </a:p>
+        </p:txBody>
+      </p:sp>
+      <p:sp>
+        <p:nvSpPr>
+          <p:cNvPr id="7" name="TextBox 6"/>
+          <p:cNvSpPr txBox="1"/>
+          <p:nvPr/>
+        </p:nvSpPr>
+        <p:spPr>
+          <a:xfrm>
+            <a:off x="914400" y="1371600"/>
+            <a:ext cx="4937760" cy="4572000"/>
+          </a:xfrm>
+          <a:prstGeom prst="rect">
+            <a:avLst/>
+          </a:prstGeom>
+          <a:noFill/>
+        </p:spPr>
+        <p:txBody>
+          <a:bodyPr wrap="square">
+            <a:spAutoFit/>
+          </a:bodyPr>
+          <a:lstStyle/>
+          <a:p>
+            <a:pPr>
+              <a:spcAft>
+                <a:spcPts val="1000"/>
+              </a:spcAft>
+              <a:defRPr b="1" sz="1450">
+                <a:solidFill>
+                  <a:srgbClr val="D97706"/>
+                </a:solidFill>
+              </a:defRPr>
+            </a:pPr>
+            <a:r>
+              <a:t>📚 KTU High-Yield Questions (K3 Apply)</a:t>
+            </a:r>
+          </a:p>
+          <a:p>
+            <a:pPr>
+              <a:spcAft>
+                <a:spcPts val="700"/>
+              </a:spcAft>
+              <a:defRPr sz="1200">
+                <a:solidFill>
+                  <a:srgbClr val="0F172A"/>
+                </a:solidFill>
+              </a:defRPr>
+            </a:pPr>
+            <a:r>
+              <a:t>Q: Draw the line coding waveforms for the bit stream `10110001` using: (a) Unipolar NRZ, (b) NRZ-L, (c) NRZ-I, (d) Manchester, (e) Differential Manchester, (f) Bipolar AMI. (9 Marks)</a:t>
+            </a:r>
+          </a:p>
+          <a:p>
+            <a:pPr>
+              <a:spcAft>
+                <a:spcPts val="700"/>
+              </a:spcAft>
+              <a:defRPr sz="1200">
+                <a:solidFill>
+                  <a:srgbClr val="0F172A"/>
+                </a:solidFill>
+              </a:defRPr>
+            </a:pPr>
+            <a:r>
+              <a:t>Q: Explain the working of Pulse Code Modulation (PCM) with Sampling Theorem ($f_s \ge 2f_{max}$), Quantization, and Encoding. (8 Marks)</a:t>
+            </a:r>
+          </a:p>
+          <a:p>
+            <a:pPr>
+              <a:spcAft>
+                <a:spcPts val="700"/>
+              </a:spcAft>
+              <a:defRPr sz="1200">
+                <a:solidFill>
+                  <a:srgbClr val="0F172A"/>
+                </a:solidFill>
+              </a:defRPr>
+            </a:pPr>
+            <a:r>
+              <a:t>Q: What is the DC component problem and baseline wander in digital transmission? (5 Marks)</a:t>
+            </a:r>
+          </a:p>
+        </p:txBody>
+      </p:sp>
+      <p:sp>
+        <p:nvSpPr>
+          <p:cNvPr id="8" name="Rounded Rectangle 7"/>
+          <p:cNvSpPr/>
+          <p:nvPr/>
+        </p:nvSpPr>
+        <p:spPr>
+          <a:xfrm>
+            <a:off x="6309360" y="1234440"/>
+            <a:ext cx="5212080" cy="4892040"/>
+          </a:xfrm>
+          <a:prstGeom prst="roundRect">
+            <a:avLst/>
+          </a:prstGeom>
+          <a:solidFill>
+            <a:srgbClr val="EEF2FF"/>
+          </a:solidFill>
+          <a:ln w="19050">
+            <a:solidFill>
+              <a:srgbClr val="0E7490"/>
+            </a:solidFill>
+          </a:ln>
+        </p:spPr>
+        <p:style>
+          <a:lnRef idx="1">
+            <a:schemeClr val="accent1"/>
+          </a:lnRef>
+          <a:fillRef idx="3">
+            <a:schemeClr val="accent1"/>
+          </a:fillRef>
+          <a:effectRef idx="2">
+            <a:schemeClr val="accent1"/>
+          </a:effectRef>
+          <a:fontRef idx="minor">
+            <a:schemeClr val="lt1"/>
+          </a:fontRef>
+        </p:style>
+        <p:txBody>
+          <a:bodyPr rtlCol="0" anchor="ctr"/>
+          <a:lstStyle/>
+          <a:p>
+            <a:pPr algn="ctr"/>
+          </a:p>
+        </p:txBody>
+      </p:sp>
+      <p:sp>
+        <p:nvSpPr>
+          <p:cNvPr id="9" name="TextBox 8"/>
+          <p:cNvSpPr txBox="1"/>
+          <p:nvPr/>
+        </p:nvSpPr>
+        <p:spPr>
+          <a:xfrm>
+            <a:off x="6492240" y="1371600"/>
+            <a:ext cx="4846320" cy="4572000"/>
+          </a:xfrm>
+          <a:prstGeom prst="rect">
+            <a:avLst/>
+          </a:prstGeom>
+          <a:noFill/>
+        </p:spPr>
+        <p:txBody>
+          <a:bodyPr wrap="square">
+            <a:spAutoFit/>
+          </a:bodyPr>
+          <a:lstStyle/>
+          <a:p>
+            <a:pPr>
+              <a:spcAft>
+                <a:spcPts val="1000"/>
+              </a:spcAft>
+              <a:defRPr b="1" sz="1450">
+                <a:solidFill>
+                  <a:srgbClr val="0E7490"/>
+                </a:solidFill>
+              </a:defRPr>
+            </a:pPr>
+            <a:r>
+              <a:t>💡 Critical Conceptual Takeaways</a:t>
             </a:r>
           </a:p>
           <a:p>
@@ -4168,12 +4895,12 @@
               </a:spcAft>
               <a:defRPr sz="1200">
                 <a:solidFill>
-                  <a:srgbClr val="1E293B"/>
+                  <a:srgbClr val="0F172A"/>
                 </a:solidFill>
               </a:defRPr>
             </a:pPr>
             <a:r>
-              <a:t>→ NRZ: Simple, DC bias issue</a:t>
+              <a:t>✔ Manchester coding guarantees a transition in every single bit cell for foolproof clock synchronization.</a:t>
             </a:r>
           </a:p>
           <a:p>
@@ -4183,12 +4910,12 @@
               </a:spcAft>
               <a:defRPr sz="1200">
                 <a:solidFill>
-                  <a:srgbClr val="1E293B"/>
+                  <a:srgbClr val="0F172A"/>
                 </a:solidFill>
               </a:defRPr>
             </a:pPr>
             <a:r>
-              <a:t>→ Manchester: 802.3, self-clocking</a:t>
+              <a:t>✔ Differential Manchester transitions at the start for bit 0, and has no start transition for bit 1.</a:t>
             </a:r>
           </a:p>
           <a:p>
@@ -4198,56 +4925,26 @@
               </a:spcAft>
               <a:defRPr sz="1200">
                 <a:solidFill>
-                  <a:srgbClr val="1E293B"/>
+                  <a:srgbClr val="0F172A"/>
                 </a:solidFill>
               </a:defRPr>
             </a:pPr>
             <a:r>
-              <a:t>→ AMI: Alternates +V/-V on 1s</a:t>
-            </a:r>
-          </a:p>
-          <a:p>
-            <a:pPr>
-              <a:spcAft>
-                <a:spcPts val="600"/>
-              </a:spcAft>
-              <a:defRPr sz="1200">
-                <a:solidFill>
-                  <a:srgbClr val="1E293B"/>
-                </a:solidFill>
-              </a:defRPr>
-            </a:pPr>
-            <a:r>
-              <a:t>→ B8ZS/HDB3: Scrambles long 0s</a:t>
-            </a:r>
-          </a:p>
-          <a:p>
-            <a:pPr>
-              <a:spcAft>
-                <a:spcPts val="600"/>
-              </a:spcAft>
-              <a:defRPr sz="1200">
-                <a:solidFill>
-                  <a:srgbClr val="1E293B"/>
-                </a:solidFill>
-              </a:defRPr>
-            </a:pPr>
-            <a:r>
-              <a:t>→ 4B/5B: Guarantees clock sync</a:t>
-            </a:r>
-          </a:p>
-        </p:txBody>
-      </p:sp>
-      <p:sp>
-        <p:nvSpPr>
-          <p:cNvPr id="9" name="TextBox 8"/>
+              <a:t>✔ PCM digitizes voice signals at 8000 samples/sec $\times$ 8 bits/sample = 64 kbps (standard DS0 channel).</a:t>
+            </a:r>
+          </a:p>
+        </p:txBody>
+      </p:sp>
+      <p:sp>
+        <p:nvSpPr>
+          <p:cNvPr id="10" name="TextBox 9"/>
           <p:cNvSpPr txBox="1"/>
           <p:nvPr/>
         </p:nvSpPr>
         <p:spPr>
           <a:xfrm>
-            <a:off x="731520" y="6309360"/>
-            <a:ext cx="10789920" cy="365760"/>
+            <a:off x="731520" y="6327648"/>
+            <a:ext cx="10789920" cy="320040"/>
           </a:xfrm>
           <a:prstGeom prst="rect">
             <a:avLst/>
@@ -4269,6 +4966,41 @@
             </a:pPr>
             <a:r>
               <a:t>PCCST501 Computer Networks | KTU 2024 Scheme | Prof. Anju Markose | Assistant Professor, Dept. of CSE | VJCET</a:t>
+            </a:r>
+          </a:p>
+        </p:txBody>
+      </p:sp>
+      <p:sp>
+        <p:nvSpPr>
+          <p:cNvPr id="11" name="TextBox 10"/>
+          <p:cNvSpPr txBox="1"/>
+          <p:nvPr/>
+        </p:nvSpPr>
+        <p:spPr>
+          <a:xfrm>
+            <a:off x="6858000" y="6327648"/>
+            <a:ext cx="4572000" cy="320040"/>
+          </a:xfrm>
+          <a:prstGeom prst="rect">
+            <a:avLst/>
+          </a:prstGeom>
+          <a:noFill/>
+        </p:spPr>
+        <p:txBody>
+          <a:bodyPr wrap="none">
+            <a:spAutoFit/>
+          </a:bodyPr>
+          <a:lstStyle/>
+          <a:p>
+            <a:pPr algn="r">
+              <a:defRPr sz="950">
+                <a:solidFill>
+                  <a:srgbClr val="64748B"/>
+                </a:solidFill>
+              </a:defRPr>
+            </a:pPr>
+            <a:r>
+              <a:t>Dept. of CSE, VJCET</a:t>
             </a:r>
           </a:p>
         </p:txBody>
